--- a/問題集/問16-20.pptx
+++ b/問題集/問16-20.pptx
@@ -4,6 +4,9 @@
   <p:sldMasterIdLst>
     <p:sldMasterId id="2147483648" r:id="rId1"/>
   </p:sldMasterIdLst>
+  <p:notesMasterIdLst>
+    <p:notesMasterId r:id="rId8"/>
+  </p:notesMasterIdLst>
   <p:sldIdLst>
     <p:sldId id="256" r:id="rId2"/>
     <p:sldId id="257" r:id="rId3"/>
@@ -120,6 +123,121 @@
 <file path=ppt/changesInfos/changesInfo1.xml><?xml version="1.0" encoding="utf-8"?>
 <pc:chgInfo xmlns:a="http://schemas.openxmlformats.org/drawingml/2006/main" xmlns:r="http://schemas.openxmlformats.org/officeDocument/2006/relationships" xmlns:ac="http://schemas.microsoft.com/office/drawing/2013/main/command" xmlns:pc="http://schemas.microsoft.com/office/powerpoint/2013/main/command">
   <pc:docChgLst>
+    <pc:chgData name="越智 統" userId="2de33d77-a65a-42d1-92e2-b40da65bb07e" providerId="ADAL" clId="{400EF8CD-DB59-4520-A61C-04DA4AF0DB19}"/>
+    <pc:docChg chg="custSel modSld">
+      <pc:chgData name="越智 統" userId="2de33d77-a65a-42d1-92e2-b40da65bb07e" providerId="ADAL" clId="{400EF8CD-DB59-4520-A61C-04DA4AF0DB19}" dt="2026-10-15T02:34:43.695" v="169" actId="20577"/>
+      <pc:docMkLst>
+        <pc:docMk/>
+      </pc:docMkLst>
+      <pc:sldChg chg="delSp modSp mod">
+        <pc:chgData name="越智 統" userId="2de33d77-a65a-42d1-92e2-b40da65bb07e" providerId="ADAL" clId="{400EF8CD-DB59-4520-A61C-04DA4AF0DB19}" dt="2026-10-15T02:24:55.014" v="5" actId="478"/>
+        <pc:sldMkLst>
+          <pc:docMk/>
+          <pc:sldMk cId="1570175009" sldId="256"/>
+        </pc:sldMkLst>
+        <pc:spChg chg="mod">
+          <ac:chgData name="越智 統" userId="2de33d77-a65a-42d1-92e2-b40da65bb07e" providerId="ADAL" clId="{400EF8CD-DB59-4520-A61C-04DA4AF0DB19}" dt="2026-10-15T02:24:49.297" v="4" actId="20577"/>
+          <ac:spMkLst>
+            <pc:docMk/>
+            <pc:sldMk cId="1570175009" sldId="256"/>
+            <ac:spMk id="2" creationId="{CE85D16A-BA53-EE03-E632-FE8CE65D4ABF}"/>
+          </ac:spMkLst>
+        </pc:spChg>
+        <pc:spChg chg="del">
+          <ac:chgData name="越智 統" userId="2de33d77-a65a-42d1-92e2-b40da65bb07e" providerId="ADAL" clId="{400EF8CD-DB59-4520-A61C-04DA4AF0DB19}" dt="2026-10-15T02:24:55.014" v="5" actId="478"/>
+          <ac:spMkLst>
+            <pc:docMk/>
+            <pc:sldMk cId="1570175009" sldId="256"/>
+            <ac:spMk id="3" creationId="{83AA0770-6090-BD1C-381B-1D4777FE114E}"/>
+          </ac:spMkLst>
+        </pc:spChg>
+      </pc:sldChg>
+      <pc:sldChg chg="modSp mod">
+        <pc:chgData name="越智 統" userId="2de33d77-a65a-42d1-92e2-b40da65bb07e" providerId="ADAL" clId="{400EF8CD-DB59-4520-A61C-04DA4AF0DB19}" dt="2026-10-15T02:25:24.223" v="23" actId="20577"/>
+        <pc:sldMkLst>
+          <pc:docMk/>
+          <pc:sldMk cId="3530105440" sldId="257"/>
+        </pc:sldMkLst>
+        <pc:spChg chg="mod">
+          <ac:chgData name="越智 統" userId="2de33d77-a65a-42d1-92e2-b40da65bb07e" providerId="ADAL" clId="{400EF8CD-DB59-4520-A61C-04DA4AF0DB19}" dt="2026-10-15T02:25:24.223" v="23" actId="20577"/>
+          <ac:spMkLst>
+            <pc:docMk/>
+            <pc:sldMk cId="3530105440" sldId="257"/>
+            <ac:spMk id="2" creationId="{94DD7F12-9B3E-F2F2-0489-76610CCF7BFB}"/>
+          </ac:spMkLst>
+        </pc:spChg>
+      </pc:sldChg>
+      <pc:sldChg chg="modSp mod">
+        <pc:chgData name="越智 統" userId="2de33d77-a65a-42d1-92e2-b40da65bb07e" providerId="ADAL" clId="{400EF8CD-DB59-4520-A61C-04DA4AF0DB19}" dt="2026-10-15T02:27:25.439" v="71" actId="20577"/>
+        <pc:sldMkLst>
+          <pc:docMk/>
+          <pc:sldMk cId="648242494" sldId="258"/>
+        </pc:sldMkLst>
+        <pc:spChg chg="mod">
+          <ac:chgData name="越智 統" userId="2de33d77-a65a-42d1-92e2-b40da65bb07e" providerId="ADAL" clId="{400EF8CD-DB59-4520-A61C-04DA4AF0DB19}" dt="2026-10-15T02:27:25.439" v="71" actId="20577"/>
+          <ac:spMkLst>
+            <pc:docMk/>
+            <pc:sldMk cId="648242494" sldId="258"/>
+            <ac:spMk id="2" creationId="{372F936B-CBBB-B56D-1208-E6E88D4FF25D}"/>
+          </ac:spMkLst>
+        </pc:spChg>
+      </pc:sldChg>
+      <pc:sldChg chg="modSp mod">
+        <pc:chgData name="越智 統" userId="2de33d77-a65a-42d1-92e2-b40da65bb07e" providerId="ADAL" clId="{400EF8CD-DB59-4520-A61C-04DA4AF0DB19}" dt="2026-10-15T02:27:51.999" v="92" actId="20577"/>
+        <pc:sldMkLst>
+          <pc:docMk/>
+          <pc:sldMk cId="2386720897" sldId="259"/>
+        </pc:sldMkLst>
+        <pc:spChg chg="mod">
+          <ac:chgData name="越智 統" userId="2de33d77-a65a-42d1-92e2-b40da65bb07e" providerId="ADAL" clId="{400EF8CD-DB59-4520-A61C-04DA4AF0DB19}" dt="2026-10-15T02:27:51.999" v="92" actId="20577"/>
+          <ac:spMkLst>
+            <pc:docMk/>
+            <pc:sldMk cId="2386720897" sldId="259"/>
+            <ac:spMk id="2" creationId="{9257C93D-8DB5-208C-5335-CB78C6DC7EAE}"/>
+          </ac:spMkLst>
+        </pc:spChg>
+      </pc:sldChg>
+      <pc:sldChg chg="modSp mod">
+        <pc:chgData name="越智 統" userId="2de33d77-a65a-42d1-92e2-b40da65bb07e" providerId="ADAL" clId="{400EF8CD-DB59-4520-A61C-04DA4AF0DB19}" dt="2026-10-15T02:28:56.749" v="126" actId="20577"/>
+        <pc:sldMkLst>
+          <pc:docMk/>
+          <pc:sldMk cId="4186866345" sldId="261"/>
+        </pc:sldMkLst>
+        <pc:spChg chg="mod">
+          <ac:chgData name="越智 統" userId="2de33d77-a65a-42d1-92e2-b40da65bb07e" providerId="ADAL" clId="{400EF8CD-DB59-4520-A61C-04DA4AF0DB19}" dt="2026-10-15T02:28:56.749" v="126" actId="20577"/>
+          <ac:spMkLst>
+            <pc:docMk/>
+            <pc:sldMk cId="4186866345" sldId="261"/>
+            <ac:spMk id="2" creationId="{9A9E94F4-5C34-7B9F-77EF-30BFE7CE7B32}"/>
+          </ac:spMkLst>
+        </pc:spChg>
+      </pc:sldChg>
+      <pc:sldChg chg="modSp mod">
+        <pc:chgData name="越智 統" userId="2de33d77-a65a-42d1-92e2-b40da65bb07e" providerId="ADAL" clId="{400EF8CD-DB59-4520-A61C-04DA4AF0DB19}" dt="2026-10-15T02:34:43.695" v="169" actId="20577"/>
+        <pc:sldMkLst>
+          <pc:docMk/>
+          <pc:sldMk cId="1761245448" sldId="262"/>
+        </pc:sldMkLst>
+        <pc:spChg chg="mod">
+          <ac:chgData name="越智 統" userId="2de33d77-a65a-42d1-92e2-b40da65bb07e" providerId="ADAL" clId="{400EF8CD-DB59-4520-A61C-04DA4AF0DB19}" dt="2026-10-15T02:34:43.695" v="169" actId="20577"/>
+          <ac:spMkLst>
+            <pc:docMk/>
+            <pc:sldMk cId="1761245448" sldId="262"/>
+            <ac:spMk id="2" creationId="{F13297F6-8EAB-8250-167C-D6BC2AA3F03B}"/>
+          </ac:spMkLst>
+        </pc:spChg>
+        <pc:spChg chg="mod">
+          <ac:chgData name="越智 統" userId="2de33d77-a65a-42d1-92e2-b40da65bb07e" providerId="ADAL" clId="{400EF8CD-DB59-4520-A61C-04DA4AF0DB19}" dt="2026-10-15T02:34:34.300" v="146" actId="20577"/>
+          <ac:spMkLst>
+            <pc:docMk/>
+            <pc:sldMk cId="1761245448" sldId="262"/>
+            <ac:spMk id="3" creationId="{E699B07D-0D65-B10B-87F5-97B68D445217}"/>
+          </ac:spMkLst>
+        </pc:spChg>
+      </pc:sldChg>
+    </pc:docChg>
+  </pc:docChgLst>
+  <pc:docChgLst>
     <pc:chgData name="越智 統" userId="2de33d77-a65a-42d1-92e2-b40da65bb07e" providerId="ADAL" clId="{97B26ABB-C4E8-42C3-8A44-69517257DADB}"/>
     <pc:docChg chg="undo custSel addSld delSld modSld sldOrd">
       <pc:chgData name="越智 統" userId="2de33d77-a65a-42d1-92e2-b40da65bb07e" providerId="ADAL" clId="{97B26ABB-C4E8-42C3-8A44-69517257DADB}" dt="2026-09-18T04:49:46.667" v="2763" actId="20577"/>
@@ -193,22 +311,6 @@
           <pc:docMk/>
           <pc:sldMk cId="2244841919" sldId="260"/>
         </pc:sldMkLst>
-        <pc:spChg chg="mod">
-          <ac:chgData name="越智 統" userId="2de33d77-a65a-42d1-92e2-b40da65bb07e" providerId="ADAL" clId="{97B26ABB-C4E8-42C3-8A44-69517257DADB}" dt="2026-09-17T15:42:59.471" v="2209" actId="20577"/>
-          <ac:spMkLst>
-            <pc:docMk/>
-            <pc:sldMk cId="2244841919" sldId="260"/>
-            <ac:spMk id="2" creationId="{3627334F-8272-C99B-D484-E710B1ECCE96}"/>
-          </ac:spMkLst>
-        </pc:spChg>
-        <pc:spChg chg="mod">
-          <ac:chgData name="越智 統" userId="2de33d77-a65a-42d1-92e2-b40da65bb07e" providerId="ADAL" clId="{97B26ABB-C4E8-42C3-8A44-69517257DADB}" dt="2026-09-17T15:40:55.352" v="2204" actId="15"/>
-          <ac:spMkLst>
-            <pc:docMk/>
-            <pc:sldMk cId="2244841919" sldId="260"/>
-            <ac:spMk id="3" creationId="{A424766E-9A4B-6462-8BC4-FF09B6FD80F6}"/>
-          </ac:spMkLst>
-        </pc:spChg>
       </pc:sldChg>
       <pc:sldChg chg="modSp new mod ord">
         <pc:chgData name="越智 統" userId="2de33d77-a65a-42d1-92e2-b40da65bb07e" providerId="ADAL" clId="{97B26ABB-C4E8-42C3-8A44-69517257DADB}" dt="2026-09-18T04:49:46.667" v="2763" actId="20577"/>
@@ -268,6 +370,471 @@
 </pc:chgInfo>
 </file>
 
+<file path=ppt/notesMasters/notesMaster1.xml><?xml version="1.0" encoding="utf-8"?>
+<p:notesMaster xmlns:a="http://schemas.openxmlformats.org/drawingml/2006/main" xmlns:r="http://schemas.openxmlformats.org/officeDocument/2006/relationships" xmlns:p="http://schemas.openxmlformats.org/presentationml/2006/main">
+  <p:cSld>
+    <p:bg>
+      <p:bgRef idx="1001">
+        <a:schemeClr val="bg1"/>
+      </p:bgRef>
+    </p:bg>
+    <p:spTree>
+      <p:nvGrpSpPr>
+        <p:cNvPr id="1" name=""/>
+        <p:cNvGrpSpPr/>
+        <p:nvPr/>
+      </p:nvGrpSpPr>
+      <p:grpSpPr>
+        <a:xfrm>
+          <a:off x="0" y="0"/>
+          <a:ext cx="0" cy="0"/>
+          <a:chOff x="0" y="0"/>
+          <a:chExt cx="0" cy="0"/>
+        </a:xfrm>
+      </p:grpSpPr>
+      <p:sp>
+        <p:nvSpPr>
+          <p:cNvPr id="2" name="ヘッダー プレースホルダー 1"/>
+          <p:cNvSpPr>
+            <a:spLocks noGrp="1"/>
+          </p:cNvSpPr>
+          <p:nvPr>
+            <p:ph type="hdr" sz="quarter"/>
+          </p:nvPr>
+        </p:nvSpPr>
+        <p:spPr>
+          <a:xfrm>
+            <a:off x="0" y="0"/>
+            <a:ext cx="2971800" cy="458788"/>
+          </a:xfrm>
+          <a:prstGeom prst="rect">
+            <a:avLst/>
+          </a:prstGeom>
+        </p:spPr>
+        <p:txBody>
+          <a:bodyPr vert="horz" lIns="91440" tIns="45720" rIns="91440" bIns="45720" rtlCol="0"/>
+          <a:lstStyle>
+            <a:lvl1pPr algn="l">
+              <a:defRPr sz="1200"/>
+            </a:lvl1pPr>
+          </a:lstStyle>
+          <a:p>
+            <a:endParaRPr kumimoji="1" lang="ja-JP" altLang="en-US"/>
+          </a:p>
+        </p:txBody>
+      </p:sp>
+      <p:sp>
+        <p:nvSpPr>
+          <p:cNvPr id="3" name="日付プレースホルダー 2"/>
+          <p:cNvSpPr>
+            <a:spLocks noGrp="1"/>
+          </p:cNvSpPr>
+          <p:nvPr>
+            <p:ph type="dt" idx="1"/>
+          </p:nvPr>
+        </p:nvSpPr>
+        <p:spPr>
+          <a:xfrm>
+            <a:off x="3884613" y="0"/>
+            <a:ext cx="2971800" cy="458788"/>
+          </a:xfrm>
+          <a:prstGeom prst="rect">
+            <a:avLst/>
+          </a:prstGeom>
+        </p:spPr>
+        <p:txBody>
+          <a:bodyPr vert="horz" lIns="91440" tIns="45720" rIns="91440" bIns="45720" rtlCol="0"/>
+          <a:lstStyle>
+            <a:lvl1pPr algn="r">
+              <a:defRPr sz="1200"/>
+            </a:lvl1pPr>
+          </a:lstStyle>
+          <a:p>
+            <a:fld id="{213AD230-6C59-4600-8422-6E5E4772C887}" type="datetimeFigureOut">
+              <a:rPr kumimoji="1" lang="ja-JP" altLang="en-US" smtClean="0"/>
+              <a:t>2026/10/15</a:t>
+            </a:fld>
+            <a:endParaRPr kumimoji="1" lang="ja-JP" altLang="en-US"/>
+          </a:p>
+        </p:txBody>
+      </p:sp>
+      <p:sp>
+        <p:nvSpPr>
+          <p:cNvPr id="4" name="スライド イメージ プレースホルダー 3"/>
+          <p:cNvSpPr>
+            <a:spLocks noGrp="1" noRot="1" noChangeAspect="1"/>
+          </p:cNvSpPr>
+          <p:nvPr>
+            <p:ph type="sldImg" idx="2"/>
+          </p:nvPr>
+        </p:nvSpPr>
+        <p:spPr>
+          <a:xfrm>
+            <a:off x="685800" y="1143000"/>
+            <a:ext cx="5486400" cy="3086100"/>
+          </a:xfrm>
+          <a:prstGeom prst="rect">
+            <a:avLst/>
+          </a:prstGeom>
+          <a:noFill/>
+          <a:ln w="12700">
+            <a:solidFill>
+              <a:prstClr val="black"/>
+            </a:solidFill>
+          </a:ln>
+        </p:spPr>
+        <p:txBody>
+          <a:bodyPr vert="horz" lIns="91440" tIns="45720" rIns="91440" bIns="45720" rtlCol="0" anchor="ctr"/>
+          <a:lstStyle/>
+          <a:p>
+            <a:endParaRPr lang="ja-JP" altLang="en-US"/>
+          </a:p>
+        </p:txBody>
+      </p:sp>
+      <p:sp>
+        <p:nvSpPr>
+          <p:cNvPr id="5" name="ノート プレースホルダー 4"/>
+          <p:cNvSpPr>
+            <a:spLocks noGrp="1"/>
+          </p:cNvSpPr>
+          <p:nvPr>
+            <p:ph type="body" sz="quarter" idx="3"/>
+          </p:nvPr>
+        </p:nvSpPr>
+        <p:spPr>
+          <a:xfrm>
+            <a:off x="685800" y="4400550"/>
+            <a:ext cx="5486400" cy="3600450"/>
+          </a:xfrm>
+          <a:prstGeom prst="rect">
+            <a:avLst/>
+          </a:prstGeom>
+        </p:spPr>
+        <p:txBody>
+          <a:bodyPr vert="horz" lIns="91440" tIns="45720" rIns="91440" bIns="45720" rtlCol="0"/>
+          <a:lstStyle/>
+          <a:p>
+            <a:pPr lvl="0"/>
+            <a:r>
+              <a:rPr kumimoji="1" lang="ja-JP" altLang="en-US"/>
+              <a:t>マスター テキストの書式設定</a:t>
+            </a:r>
+          </a:p>
+          <a:p>
+            <a:pPr lvl="1"/>
+            <a:r>
+              <a:rPr kumimoji="1" lang="ja-JP" altLang="en-US"/>
+              <a:t>第 </a:t>
+            </a:r>
+            <a:r>
+              <a:rPr kumimoji="1" lang="en-US" altLang="ja-JP"/>
+              <a:t>2 </a:t>
+            </a:r>
+            <a:r>
+              <a:rPr kumimoji="1" lang="ja-JP" altLang="en-US"/>
+              <a:t>レベル</a:t>
+            </a:r>
+          </a:p>
+          <a:p>
+            <a:pPr lvl="2"/>
+            <a:r>
+              <a:rPr kumimoji="1" lang="ja-JP" altLang="en-US"/>
+              <a:t>第 </a:t>
+            </a:r>
+            <a:r>
+              <a:rPr kumimoji="1" lang="en-US" altLang="ja-JP"/>
+              <a:t>3 </a:t>
+            </a:r>
+            <a:r>
+              <a:rPr kumimoji="1" lang="ja-JP" altLang="en-US"/>
+              <a:t>レベル</a:t>
+            </a:r>
+          </a:p>
+          <a:p>
+            <a:pPr lvl="3"/>
+            <a:r>
+              <a:rPr kumimoji="1" lang="ja-JP" altLang="en-US"/>
+              <a:t>第 </a:t>
+            </a:r>
+            <a:r>
+              <a:rPr kumimoji="1" lang="en-US" altLang="ja-JP"/>
+              <a:t>4 </a:t>
+            </a:r>
+            <a:r>
+              <a:rPr kumimoji="1" lang="ja-JP" altLang="en-US"/>
+              <a:t>レベル</a:t>
+            </a:r>
+          </a:p>
+          <a:p>
+            <a:pPr lvl="4"/>
+            <a:r>
+              <a:rPr kumimoji="1" lang="ja-JP" altLang="en-US"/>
+              <a:t>第 </a:t>
+            </a:r>
+            <a:r>
+              <a:rPr kumimoji="1" lang="en-US" altLang="ja-JP"/>
+              <a:t>5 </a:t>
+            </a:r>
+            <a:r>
+              <a:rPr kumimoji="1" lang="ja-JP" altLang="en-US"/>
+              <a:t>レベル</a:t>
+            </a:r>
+          </a:p>
+        </p:txBody>
+      </p:sp>
+      <p:sp>
+        <p:nvSpPr>
+          <p:cNvPr id="6" name="フッター プレースホルダー 5"/>
+          <p:cNvSpPr>
+            <a:spLocks noGrp="1"/>
+          </p:cNvSpPr>
+          <p:nvPr>
+            <p:ph type="ftr" sz="quarter" idx="4"/>
+          </p:nvPr>
+        </p:nvSpPr>
+        <p:spPr>
+          <a:xfrm>
+            <a:off x="0" y="8685213"/>
+            <a:ext cx="2971800" cy="458787"/>
+          </a:xfrm>
+          <a:prstGeom prst="rect">
+            <a:avLst/>
+          </a:prstGeom>
+        </p:spPr>
+        <p:txBody>
+          <a:bodyPr vert="horz" lIns="91440" tIns="45720" rIns="91440" bIns="45720" rtlCol="0" anchor="b"/>
+          <a:lstStyle>
+            <a:lvl1pPr algn="l">
+              <a:defRPr sz="1200"/>
+            </a:lvl1pPr>
+          </a:lstStyle>
+          <a:p>
+            <a:endParaRPr kumimoji="1" lang="ja-JP" altLang="en-US"/>
+          </a:p>
+        </p:txBody>
+      </p:sp>
+      <p:sp>
+        <p:nvSpPr>
+          <p:cNvPr id="7" name="スライド番号プレースホルダー 6"/>
+          <p:cNvSpPr>
+            <a:spLocks noGrp="1"/>
+          </p:cNvSpPr>
+          <p:nvPr>
+            <p:ph type="sldNum" sz="quarter" idx="5"/>
+          </p:nvPr>
+        </p:nvSpPr>
+        <p:spPr>
+          <a:xfrm>
+            <a:off x="3884613" y="8685213"/>
+            <a:ext cx="2971800" cy="458787"/>
+          </a:xfrm>
+          <a:prstGeom prst="rect">
+            <a:avLst/>
+          </a:prstGeom>
+        </p:spPr>
+        <p:txBody>
+          <a:bodyPr vert="horz" lIns="91440" tIns="45720" rIns="91440" bIns="45720" rtlCol="0" anchor="b"/>
+          <a:lstStyle>
+            <a:lvl1pPr algn="r">
+              <a:defRPr sz="1200"/>
+            </a:lvl1pPr>
+          </a:lstStyle>
+          <a:p>
+            <a:fld id="{774B3426-1340-4905-A5B9-F41445688B9C}" type="slidenum">
+              <a:rPr kumimoji="1" lang="ja-JP" altLang="en-US" smtClean="0"/>
+              <a:t>‹#›</a:t>
+            </a:fld>
+            <a:endParaRPr kumimoji="1" lang="ja-JP" altLang="en-US"/>
+          </a:p>
+        </p:txBody>
+      </p:sp>
+    </p:spTree>
+    <p:extLst>
+      <p:ext uri="{BB962C8B-B14F-4D97-AF65-F5344CB8AC3E}">
+        <p14:creationId xmlns:p14="http://schemas.microsoft.com/office/powerpoint/2010/main" val="2698817589"/>
+      </p:ext>
+    </p:extLst>
+  </p:cSld>
+  <p:clrMap bg1="lt1" tx1="dk1" bg2="lt2" tx2="dk2" accent1="accent1" accent2="accent2" accent3="accent3" accent4="accent4" accent5="accent5" accent6="accent6" hlink="hlink" folHlink="folHlink"/>
+  <p:notesStyle>
+    <a:lvl1pPr marL="0" algn="l" defTabSz="914400" rtl="0" eaLnBrk="1" latinLnBrk="0" hangingPunct="1">
+      <a:defRPr kumimoji="1" sz="1200" kern="1200">
+        <a:solidFill>
+          <a:schemeClr val="tx1"/>
+        </a:solidFill>
+        <a:latin typeface="+mn-lt"/>
+        <a:ea typeface="+mn-ea"/>
+        <a:cs typeface="+mn-cs"/>
+      </a:defRPr>
+    </a:lvl1pPr>
+    <a:lvl2pPr marL="457200" algn="l" defTabSz="914400" rtl="0" eaLnBrk="1" latinLnBrk="0" hangingPunct="1">
+      <a:defRPr kumimoji="1" sz="1200" kern="1200">
+        <a:solidFill>
+          <a:schemeClr val="tx1"/>
+        </a:solidFill>
+        <a:latin typeface="+mn-lt"/>
+        <a:ea typeface="+mn-ea"/>
+        <a:cs typeface="+mn-cs"/>
+      </a:defRPr>
+    </a:lvl2pPr>
+    <a:lvl3pPr marL="914400" algn="l" defTabSz="914400" rtl="0" eaLnBrk="1" latinLnBrk="0" hangingPunct="1">
+      <a:defRPr kumimoji="1" sz="1200" kern="1200">
+        <a:solidFill>
+          <a:schemeClr val="tx1"/>
+        </a:solidFill>
+        <a:latin typeface="+mn-lt"/>
+        <a:ea typeface="+mn-ea"/>
+        <a:cs typeface="+mn-cs"/>
+      </a:defRPr>
+    </a:lvl3pPr>
+    <a:lvl4pPr marL="1371600" algn="l" defTabSz="914400" rtl="0" eaLnBrk="1" latinLnBrk="0" hangingPunct="1">
+      <a:defRPr kumimoji="1" sz="1200" kern="1200">
+        <a:solidFill>
+          <a:schemeClr val="tx1"/>
+        </a:solidFill>
+        <a:latin typeface="+mn-lt"/>
+        <a:ea typeface="+mn-ea"/>
+        <a:cs typeface="+mn-cs"/>
+      </a:defRPr>
+    </a:lvl4pPr>
+    <a:lvl5pPr marL="1828800" algn="l" defTabSz="914400" rtl="0" eaLnBrk="1" latinLnBrk="0" hangingPunct="1">
+      <a:defRPr kumimoji="1" sz="1200" kern="1200">
+        <a:solidFill>
+          <a:schemeClr val="tx1"/>
+        </a:solidFill>
+        <a:latin typeface="+mn-lt"/>
+        <a:ea typeface="+mn-ea"/>
+        <a:cs typeface="+mn-cs"/>
+      </a:defRPr>
+    </a:lvl5pPr>
+    <a:lvl6pPr marL="2286000" algn="l" defTabSz="914400" rtl="0" eaLnBrk="1" latinLnBrk="0" hangingPunct="1">
+      <a:defRPr kumimoji="1" sz="1200" kern="1200">
+        <a:solidFill>
+          <a:schemeClr val="tx1"/>
+        </a:solidFill>
+        <a:latin typeface="+mn-lt"/>
+        <a:ea typeface="+mn-ea"/>
+        <a:cs typeface="+mn-cs"/>
+      </a:defRPr>
+    </a:lvl6pPr>
+    <a:lvl7pPr marL="2743200" algn="l" defTabSz="914400" rtl="0" eaLnBrk="1" latinLnBrk="0" hangingPunct="1">
+      <a:defRPr kumimoji="1" sz="1200" kern="1200">
+        <a:solidFill>
+          <a:schemeClr val="tx1"/>
+        </a:solidFill>
+        <a:latin typeface="+mn-lt"/>
+        <a:ea typeface="+mn-ea"/>
+        <a:cs typeface="+mn-cs"/>
+      </a:defRPr>
+    </a:lvl7pPr>
+    <a:lvl8pPr marL="3200400" algn="l" defTabSz="914400" rtl="0" eaLnBrk="1" latinLnBrk="0" hangingPunct="1">
+      <a:defRPr kumimoji="1" sz="1200" kern="1200">
+        <a:solidFill>
+          <a:schemeClr val="tx1"/>
+        </a:solidFill>
+        <a:latin typeface="+mn-lt"/>
+        <a:ea typeface="+mn-ea"/>
+        <a:cs typeface="+mn-cs"/>
+      </a:defRPr>
+    </a:lvl8pPr>
+    <a:lvl9pPr marL="3657600" algn="l" defTabSz="914400" rtl="0" eaLnBrk="1" latinLnBrk="0" hangingPunct="1">
+      <a:defRPr kumimoji="1" sz="1200" kern="1200">
+        <a:solidFill>
+          <a:schemeClr val="tx1"/>
+        </a:solidFill>
+        <a:latin typeface="+mn-lt"/>
+        <a:ea typeface="+mn-ea"/>
+        <a:cs typeface="+mn-cs"/>
+      </a:defRPr>
+    </a:lvl9pPr>
+  </p:notesStyle>
+</p:notesMaster>
+</file>
+
+<file path=ppt/notesSlides/notesSlide1.xml><?xml version="1.0" encoding="utf-8"?>
+<p:notes xmlns:a="http://schemas.openxmlformats.org/drawingml/2006/main" xmlns:r="http://schemas.openxmlformats.org/officeDocument/2006/relationships" xmlns:p="http://schemas.openxmlformats.org/presentationml/2006/main">
+  <p:cSld>
+    <p:spTree>
+      <p:nvGrpSpPr>
+        <p:cNvPr id="1" name=""/>
+        <p:cNvGrpSpPr/>
+        <p:nvPr/>
+      </p:nvGrpSpPr>
+      <p:grpSpPr>
+        <a:xfrm>
+          <a:off x="0" y="0"/>
+          <a:ext cx="0" cy="0"/>
+          <a:chOff x="0" y="0"/>
+          <a:chExt cx="0" cy="0"/>
+        </a:xfrm>
+      </p:grpSpPr>
+      <p:sp>
+        <p:nvSpPr>
+          <p:cNvPr id="2" name="スライド イメージ プレースホルダー 1"/>
+          <p:cNvSpPr>
+            <a:spLocks noGrp="1" noRot="1" noChangeAspect="1"/>
+          </p:cNvSpPr>
+          <p:nvPr>
+            <p:ph type="sldImg"/>
+          </p:nvPr>
+        </p:nvSpPr>
+        <p:spPr/>
+      </p:sp>
+      <p:sp>
+        <p:nvSpPr>
+          <p:cNvPr id="3" name="ノート プレースホルダー 2"/>
+          <p:cNvSpPr>
+            <a:spLocks noGrp="1"/>
+          </p:cNvSpPr>
+          <p:nvPr>
+            <p:ph type="body" idx="1"/>
+          </p:nvPr>
+        </p:nvSpPr>
+        <p:spPr/>
+        <p:txBody>
+          <a:bodyPr/>
+          <a:lstStyle/>
+          <a:p>
+            <a:endParaRPr kumimoji="1" lang="ja-JP" altLang="en-US"/>
+          </a:p>
+        </p:txBody>
+      </p:sp>
+      <p:sp>
+        <p:nvSpPr>
+          <p:cNvPr id="4" name="スライド番号プレースホルダー 3"/>
+          <p:cNvSpPr>
+            <a:spLocks noGrp="1"/>
+          </p:cNvSpPr>
+          <p:nvPr>
+            <p:ph type="sldNum" sz="quarter" idx="5"/>
+          </p:nvPr>
+        </p:nvSpPr>
+        <p:spPr/>
+        <p:txBody>
+          <a:bodyPr/>
+          <a:lstStyle/>
+          <a:p>
+            <a:fld id="{774B3426-1340-4905-A5B9-F41445688B9C}" type="slidenum">
+              <a:rPr kumimoji="1" lang="ja-JP" altLang="en-US" smtClean="0"/>
+              <a:t>6</a:t>
+            </a:fld>
+            <a:endParaRPr kumimoji="1" lang="ja-JP" altLang="en-US"/>
+          </a:p>
+        </p:txBody>
+      </p:sp>
+    </p:spTree>
+    <p:extLst>
+      <p:ext uri="{BB962C8B-B14F-4D97-AF65-F5344CB8AC3E}">
+        <p14:creationId xmlns:p14="http://schemas.microsoft.com/office/powerpoint/2010/main" val="1428460129"/>
+      </p:ext>
+    </p:extLst>
+  </p:cSld>
+  <p:clrMapOvr>
+    <a:masterClrMapping/>
+  </p:clrMapOvr>
+</p:notes>
+</file>
+
 <file path=ppt/slideLayouts/slideLayout1.xml><?xml version="1.0" encoding="utf-8"?>
 <p:sldLayout xmlns:a="http://schemas.openxmlformats.org/drawingml/2006/main" xmlns:r="http://schemas.openxmlformats.org/officeDocument/2006/relationships" xmlns:p="http://schemas.openxmlformats.org/presentationml/2006/main" type="title" preserve="1">
   <p:cSld name="タイトル スライド">
@@ -415,7 +982,7 @@
           <a:p>
             <a:fld id="{A4C3B4FA-B1A1-42CA-852B-C72C39E7D8B3}" type="datetimeFigureOut">
               <a:rPr kumimoji="1" lang="ja-JP" altLang="en-US" smtClean="0"/>
-              <a:t>2026/9/18</a:t>
+              <a:t>2026/10/15</a:t>
             </a:fld>
             <a:endParaRPr kumimoji="1" lang="ja-JP" altLang="en-US"/>
           </a:p>
@@ -645,7 +1212,7 @@
           <a:p>
             <a:fld id="{A4C3B4FA-B1A1-42CA-852B-C72C39E7D8B3}" type="datetimeFigureOut">
               <a:rPr kumimoji="1" lang="ja-JP" altLang="en-US" smtClean="0"/>
-              <a:t>2026/9/18</a:t>
+              <a:t>2026/10/15</a:t>
             </a:fld>
             <a:endParaRPr kumimoji="1" lang="ja-JP" altLang="en-US"/>
           </a:p>
@@ -885,7 +1452,7 @@
           <a:p>
             <a:fld id="{A4C3B4FA-B1A1-42CA-852B-C72C39E7D8B3}" type="datetimeFigureOut">
               <a:rPr kumimoji="1" lang="ja-JP" altLang="en-US" smtClean="0"/>
-              <a:t>2026/9/18</a:t>
+              <a:t>2026/10/15</a:t>
             </a:fld>
             <a:endParaRPr kumimoji="1" lang="ja-JP" altLang="en-US"/>
           </a:p>
@@ -1115,7 +1682,7 @@
           <a:p>
             <a:fld id="{A4C3B4FA-B1A1-42CA-852B-C72C39E7D8B3}" type="datetimeFigureOut">
               <a:rPr kumimoji="1" lang="ja-JP" altLang="en-US" smtClean="0"/>
-              <a:t>2026/9/18</a:t>
+              <a:t>2026/10/15</a:t>
             </a:fld>
             <a:endParaRPr kumimoji="1" lang="ja-JP" altLang="en-US"/>
           </a:p>
@@ -1390,7 +1957,7 @@
           <a:p>
             <a:fld id="{A4C3B4FA-B1A1-42CA-852B-C72C39E7D8B3}" type="datetimeFigureOut">
               <a:rPr kumimoji="1" lang="ja-JP" altLang="en-US" smtClean="0"/>
-              <a:t>2026/9/18</a:t>
+              <a:t>2026/10/15</a:t>
             </a:fld>
             <a:endParaRPr kumimoji="1" lang="ja-JP" altLang="en-US"/>
           </a:p>
@@ -1719,7 +2286,7 @@
           <a:p>
             <a:fld id="{A4C3B4FA-B1A1-42CA-852B-C72C39E7D8B3}" type="datetimeFigureOut">
               <a:rPr kumimoji="1" lang="ja-JP" altLang="en-US" smtClean="0"/>
-              <a:t>2026/9/18</a:t>
+              <a:t>2026/10/15</a:t>
             </a:fld>
             <a:endParaRPr kumimoji="1" lang="ja-JP" altLang="en-US"/>
           </a:p>
@@ -2195,7 +2762,7 @@
           <a:p>
             <a:fld id="{A4C3B4FA-B1A1-42CA-852B-C72C39E7D8B3}" type="datetimeFigureOut">
               <a:rPr kumimoji="1" lang="ja-JP" altLang="en-US" smtClean="0"/>
-              <a:t>2026/9/18</a:t>
+              <a:t>2026/10/15</a:t>
             </a:fld>
             <a:endParaRPr kumimoji="1" lang="ja-JP" altLang="en-US"/>
           </a:p>
@@ -2336,7 +2903,7 @@
           <a:p>
             <a:fld id="{A4C3B4FA-B1A1-42CA-852B-C72C39E7D8B3}" type="datetimeFigureOut">
               <a:rPr kumimoji="1" lang="ja-JP" altLang="en-US" smtClean="0"/>
-              <a:t>2026/9/18</a:t>
+              <a:t>2026/10/15</a:t>
             </a:fld>
             <a:endParaRPr kumimoji="1" lang="ja-JP" altLang="en-US"/>
           </a:p>
@@ -2449,7 +3016,7 @@
           <a:p>
             <a:fld id="{A4C3B4FA-B1A1-42CA-852B-C72C39E7D8B3}" type="datetimeFigureOut">
               <a:rPr kumimoji="1" lang="ja-JP" altLang="en-US" smtClean="0"/>
-              <a:t>2026/9/18</a:t>
+              <a:t>2026/10/15</a:t>
             </a:fld>
             <a:endParaRPr kumimoji="1" lang="ja-JP" altLang="en-US"/>
           </a:p>
@@ -2792,7 +3359,7 @@
           <a:p>
             <a:fld id="{A4C3B4FA-B1A1-42CA-852B-C72C39E7D8B3}" type="datetimeFigureOut">
               <a:rPr kumimoji="1" lang="ja-JP" altLang="en-US" smtClean="0"/>
-              <a:t>2026/9/18</a:t>
+              <a:t>2026/10/15</a:t>
             </a:fld>
             <a:endParaRPr kumimoji="1" lang="ja-JP" altLang="en-US"/>
           </a:p>
@@ -3080,7 +3647,7 @@
           <a:p>
             <a:fld id="{A4C3B4FA-B1A1-42CA-852B-C72C39E7D8B3}" type="datetimeFigureOut">
               <a:rPr kumimoji="1" lang="ja-JP" altLang="en-US" smtClean="0"/>
-              <a:t>2026/9/18</a:t>
+              <a:t>2026/10/15</a:t>
             </a:fld>
             <a:endParaRPr kumimoji="1" lang="ja-JP" altLang="en-US"/>
           </a:p>
@@ -3353,7 +3920,7 @@
           <a:p>
             <a:fld id="{A4C3B4FA-B1A1-42CA-852B-C72C39E7D8B3}" type="datetimeFigureOut">
               <a:rPr kumimoji="1" lang="ja-JP" altLang="en-US" smtClean="0"/>
-              <a:t>2026/9/18</a:t>
+              <a:t>2026/10/15</a:t>
             </a:fld>
             <a:endParaRPr kumimoji="1" lang="ja-JP" altLang="en-US"/>
           </a:p>
@@ -3791,32 +4358,11 @@
           <a:bodyPr/>
           <a:lstStyle/>
           <a:p>
-            <a:endParaRPr kumimoji="1" lang="ja-JP" altLang="en-US"/>
-          </a:p>
-        </p:txBody>
-      </p:sp>
-      <p:sp>
-        <p:nvSpPr>
-          <p:cNvPr id="3" name="字幕 2">
-            <a:extLst>
-              <a:ext uri="{FF2B5EF4-FFF2-40B4-BE49-F238E27FC236}">
-                <a16:creationId xmlns:a16="http://schemas.microsoft.com/office/drawing/2014/main" id="{83AA0770-6090-BD1C-381B-1D4777FE114E}"/>
-              </a:ext>
-            </a:extLst>
-          </p:cNvPr>
-          <p:cNvSpPr>
-            <a:spLocks noGrp="1"/>
-          </p:cNvSpPr>
-          <p:nvPr>
-            <p:ph type="subTitle" idx="1"/>
-          </p:nvPr>
-        </p:nvSpPr>
-        <p:spPr/>
-        <p:txBody>
-          <a:bodyPr/>
-          <a:lstStyle/>
-          <a:p>
-            <a:endParaRPr kumimoji="1" lang="ja-JP" altLang="en-US"/>
+            <a:r>
+              <a:rPr kumimoji="1" lang="en-US" altLang="ja-JP" dirty="0"/>
+              <a:t>16-20</a:t>
+            </a:r>
+            <a:endParaRPr kumimoji="1" lang="ja-JP" altLang="en-US" dirty="0"/>
           </a:p>
         </p:txBody>
       </p:sp>
@@ -3872,8 +4418,20 @@
           <a:lstStyle/>
           <a:p>
             <a:r>
+              <a:rPr kumimoji="1" lang="ja-JP" altLang="en-US" dirty="0"/>
+              <a:t>問</a:t>
+            </a:r>
+            <a:r>
               <a:rPr kumimoji="1" lang="en-US" altLang="ja-JP" dirty="0"/>
-              <a:t>16</a:t>
+              <a:t>16: </a:t>
+            </a:r>
+            <a:r>
+              <a:rPr kumimoji="1" lang="ja-JP" altLang="en-US" dirty="0"/>
+              <a:t>写像</a:t>
+            </a:r>
+            <a:r>
+              <a:rPr kumimoji="1" lang="en-US" altLang="ja-JP" dirty="0"/>
+              <a:t> </a:t>
             </a:r>
             <a:endParaRPr kumimoji="1" lang="ja-JP" altLang="en-US" dirty="0"/>
           </a:p>
@@ -4053,10 +4611,17 @@
           <a:lstStyle/>
           <a:p>
             <a:r>
+              <a:rPr kumimoji="1" lang="ja-JP" altLang="en-US" dirty="0"/>
+              <a:t>問</a:t>
+            </a:r>
+            <a:r>
               <a:rPr kumimoji="1" lang="en-US" altLang="ja-JP" dirty="0"/>
-              <a:t>17</a:t>
-            </a:r>
-            <a:endParaRPr kumimoji="1" lang="ja-JP" altLang="en-US" dirty="0"/>
+              <a:t>17: </a:t>
+            </a:r>
+            <a:r>
+              <a:rPr kumimoji="1" lang="ja-JP" altLang="en-US" dirty="0"/>
+              <a:t>書き分かち</a:t>
+            </a:r>
           </a:p>
         </p:txBody>
       </p:sp>
@@ -4282,10 +4847,17 @@
           <a:lstStyle/>
           <a:p>
             <a:r>
+              <a:rPr kumimoji="1" lang="ja-JP" altLang="en-US" dirty="0"/>
+              <a:t>問</a:t>
+            </a:r>
+            <a:r>
               <a:rPr kumimoji="1" lang="en-US" altLang="ja-JP" dirty="0"/>
-              <a:t>18</a:t>
-            </a:r>
-            <a:endParaRPr kumimoji="1" lang="ja-JP" altLang="en-US" dirty="0"/>
+              <a:t>18: </a:t>
+            </a:r>
+            <a:r>
+              <a:rPr kumimoji="1" lang="ja-JP" altLang="en-US" dirty="0"/>
+              <a:t>？？？</a:t>
+            </a:r>
           </a:p>
         </p:txBody>
       </p:sp>
@@ -4549,10 +5121,33 @@
           <a:lstStyle/>
           <a:p>
             <a:r>
+              <a:rPr kumimoji="1" lang="ja-JP" altLang="en-US" dirty="0"/>
+              <a:t>問</a:t>
+            </a:r>
+            <a:r>
               <a:rPr kumimoji="1" lang="en-US" altLang="ja-JP" dirty="0"/>
-              <a:t>19</a:t>
-            </a:r>
-            <a:endParaRPr kumimoji="1" lang="ja-JP" altLang="en-US" dirty="0"/>
+              <a:t>19: </a:t>
+            </a:r>
+            <a:r>
+              <a:rPr kumimoji="1" lang="ja-JP" altLang="en-US" dirty="0"/>
+              <a:t>カエサル</a:t>
+            </a:r>
+            <a:r>
+              <a:rPr kumimoji="1" lang="en-US" altLang="ja-JP" dirty="0"/>
+              <a:t>(</a:t>
+            </a:r>
+            <a:r>
+              <a:rPr kumimoji="1" lang="ja-JP" altLang="en-US" dirty="0"/>
+              <a:t>シーザー</a:t>
+            </a:r>
+            <a:r>
+              <a:rPr kumimoji="1" lang="en-US" altLang="ja-JP" dirty="0"/>
+              <a:t>)</a:t>
+            </a:r>
+            <a:r>
+              <a:rPr kumimoji="1" lang="ja-JP" altLang="en-US" dirty="0"/>
+              <a:t>暗号</a:t>
+            </a:r>
           </a:p>
         </p:txBody>
       </p:sp>
@@ -4641,7 +5236,7 @@
               <a:t>: </a:t>
             </a:r>
             <a:r>
-              <a:rPr lang="ja-JP" altLang="en-US"/>
+              <a:rPr lang="ja-JP" altLang="en-US" dirty="0"/>
               <a:t>復号キー</a:t>
             </a:r>
             <a:r>
@@ -4759,10 +5354,17 @@
           <a:lstStyle/>
           <a:p>
             <a:r>
+              <a:rPr kumimoji="1" lang="ja-JP" altLang="en-US" dirty="0"/>
+              <a:t>問</a:t>
+            </a:r>
+            <a:r>
               <a:rPr kumimoji="1" lang="en-US" altLang="ja-JP" dirty="0"/>
-              <a:t>20</a:t>
-            </a:r>
-            <a:endParaRPr kumimoji="1" lang="ja-JP" altLang="en-US" dirty="0"/>
+              <a:t>20: </a:t>
+            </a:r>
+            <a:r>
+              <a:rPr kumimoji="1" lang="ja-JP" altLang="en-US" dirty="0"/>
+              <a:t>トレース問題</a:t>
+            </a:r>
           </a:p>
         </p:txBody>
       </p:sp>
@@ -4795,6 +5397,11 @@
               <a:rPr kumimoji="1" lang="en-US" altLang="ja-JP" dirty="0"/>
               <a:t>: </a:t>
             </a:r>
+            <a:r>
+              <a:rPr kumimoji="1" lang="ja-JP" altLang="en-US" dirty="0"/>
+              <a:t>不明</a:t>
+            </a:r>
+            <a:endParaRPr kumimoji="1" lang="en-US" altLang="ja-JP" dirty="0"/>
           </a:p>
           <a:p>
             <a:r>
@@ -5196,4 +5803,319 @@
     </a:ext>
   </a:extLst>
 </a:theme>
+</file>
+
+<file path=ppt/theme/theme2.xml><?xml version="1.0" encoding="utf-8"?>
+<a:theme xmlns:a="http://schemas.openxmlformats.org/drawingml/2006/main" name="Office テーマ">
+  <a:themeElements>
+    <a:clrScheme name="Office">
+      <a:dk1>
+        <a:sysClr val="windowText" lastClr="000000"/>
+      </a:dk1>
+      <a:lt1>
+        <a:sysClr val="window" lastClr="FFFFFF"/>
+      </a:lt1>
+      <a:dk2>
+        <a:srgbClr val="0E2841"/>
+      </a:dk2>
+      <a:lt2>
+        <a:srgbClr val="E8E8E8"/>
+      </a:lt2>
+      <a:accent1>
+        <a:srgbClr val="156082"/>
+      </a:accent1>
+      <a:accent2>
+        <a:srgbClr val="E97132"/>
+      </a:accent2>
+      <a:accent3>
+        <a:srgbClr val="196B24"/>
+      </a:accent3>
+      <a:accent4>
+        <a:srgbClr val="0F9ED5"/>
+      </a:accent4>
+      <a:accent5>
+        <a:srgbClr val="A02B93"/>
+      </a:accent5>
+      <a:accent6>
+        <a:srgbClr val="4EA72E"/>
+      </a:accent6>
+      <a:hlink>
+        <a:srgbClr val="467886"/>
+      </a:hlink>
+      <a:folHlink>
+        <a:srgbClr val="96607D"/>
+      </a:folHlink>
+    </a:clrScheme>
+    <a:fontScheme name="Office">
+      <a:majorFont>
+        <a:latin typeface="游ゴシック Light" panose="02110004020202020204"/>
+        <a:ea typeface=""/>
+        <a:cs typeface=""/>
+        <a:font script="Jpan" typeface="游ゴシック Light"/>
+        <a:font script="Hang" typeface="맑은 고딕"/>
+        <a:font script="Hans" typeface="等线 Light"/>
+        <a:font script="Hant" typeface="新細明體"/>
+        <a:font script="Arab" typeface="Times New Roman"/>
+        <a:font script="Hebr" typeface="Times New Roman"/>
+        <a:font script="Thai" typeface="Angsana New"/>
+        <a:font script="Ethi" typeface="Nyala"/>
+        <a:font script="Beng" typeface="Vrinda"/>
+        <a:font script="Gujr" typeface="Shruti"/>
+        <a:font script="Khmr" typeface="MoolBoran"/>
+        <a:font script="Knda" typeface="Tunga"/>
+        <a:font script="Guru" typeface="Raavi"/>
+        <a:font script="Cans" typeface="Euphemia"/>
+        <a:font script="Cher" typeface="Plantagenet Cherokee"/>
+        <a:font script="Yiii" typeface="Microsoft Yi Baiti"/>
+        <a:font script="Tibt" typeface="Microsoft Himalaya"/>
+        <a:font script="Thaa" typeface="MV Boli"/>
+        <a:font script="Deva" typeface="Mangal"/>
+        <a:font script="Telu" typeface="Gautami"/>
+        <a:font script="Taml" typeface="Latha"/>
+        <a:font script="Syrc" typeface="Estrangelo Edessa"/>
+        <a:font script="Orya" typeface="Kalinga"/>
+        <a:font script="Mlym" typeface="Kartika"/>
+        <a:font script="Laoo" typeface="DokChampa"/>
+        <a:font script="Sinh" typeface="Iskoola Pota"/>
+        <a:font script="Mong" typeface="Mongolian Baiti"/>
+        <a:font script="Viet" typeface="Times New Roman"/>
+        <a:font script="Uigh" typeface="Microsoft Uighur"/>
+        <a:font script="Geor" typeface="Sylfaen"/>
+        <a:font script="Armn" typeface="Arial"/>
+        <a:font script="Bugi" typeface="Leelawadee UI"/>
+        <a:font script="Bopo" typeface="Microsoft JhengHei"/>
+        <a:font script="Java" typeface="Javanese Text"/>
+        <a:font script="Lisu" typeface="Segoe UI"/>
+        <a:font script="Mymr" typeface="Myanmar Text"/>
+        <a:font script="Nkoo" typeface="Ebrima"/>
+        <a:font script="Olck" typeface="Nirmala UI"/>
+        <a:font script="Osma" typeface="Ebrima"/>
+        <a:font script="Phag" typeface="Phagspa"/>
+        <a:font script="Syrn" typeface="Estrangelo Edessa"/>
+        <a:font script="Syrj" typeface="Estrangelo Edessa"/>
+        <a:font script="Syre" typeface="Estrangelo Edessa"/>
+        <a:font script="Sora" typeface="Nirmala UI"/>
+        <a:font script="Tale" typeface="Microsoft Tai Le"/>
+        <a:font script="Talu" typeface="Microsoft New Tai Lue"/>
+        <a:font script="Tfng" typeface="Ebrima"/>
+      </a:majorFont>
+      <a:minorFont>
+        <a:latin typeface="游ゴシック" panose="02110004020202020204"/>
+        <a:ea typeface=""/>
+        <a:cs typeface=""/>
+        <a:font script="Jpan" typeface="游ゴシック"/>
+        <a:font script="Hang" typeface="맑은 고딕"/>
+        <a:font script="Hans" typeface="等线"/>
+        <a:font script="Hant" typeface="新細明體"/>
+        <a:font script="Arab" typeface="Arial"/>
+        <a:font script="Hebr" typeface="Arial"/>
+        <a:font script="Thai" typeface="Cordia New"/>
+        <a:font script="Ethi" typeface="Nyala"/>
+        <a:font script="Beng" typeface="Vrinda"/>
+        <a:font script="Gujr" typeface="Shruti"/>
+        <a:font script="Khmr" typeface="DaunPenh"/>
+        <a:font script="Knda" typeface="Tunga"/>
+        <a:font script="Guru" typeface="Raavi"/>
+        <a:font script="Cans" typeface="Euphemia"/>
+        <a:font script="Cher" typeface="Plantagenet Cherokee"/>
+        <a:font script="Yiii" typeface="Microsoft Yi Baiti"/>
+        <a:font script="Tibt" typeface="Microsoft Himalaya"/>
+        <a:font script="Thaa" typeface="MV Boli"/>
+        <a:font script="Deva" typeface="Mangal"/>
+        <a:font script="Telu" typeface="Gautami"/>
+        <a:font script="Taml" typeface="Latha"/>
+        <a:font script="Syrc" typeface="Estrangelo Edessa"/>
+        <a:font script="Orya" typeface="Kalinga"/>
+        <a:font script="Mlym" typeface="Kartika"/>
+        <a:font script="Laoo" typeface="DokChampa"/>
+        <a:font script="Sinh" typeface="Iskoola Pota"/>
+        <a:font script="Mong" typeface="Mongolian Baiti"/>
+        <a:font script="Viet" typeface="Arial"/>
+        <a:font script="Uigh" typeface="Microsoft Uighur"/>
+        <a:font script="Geor" typeface="Sylfaen"/>
+        <a:font script="Armn" typeface="Arial"/>
+        <a:font script="Bugi" typeface="Leelawadee UI"/>
+        <a:font script="Bopo" typeface="Microsoft JhengHei"/>
+        <a:font script="Java" typeface="Javanese Text"/>
+        <a:font script="Lisu" typeface="Segoe UI"/>
+        <a:font script="Mymr" typeface="Myanmar Text"/>
+        <a:font script="Nkoo" typeface="Ebrima"/>
+        <a:font script="Olck" typeface="Nirmala UI"/>
+        <a:font script="Osma" typeface="Ebrima"/>
+        <a:font script="Phag" typeface="Phagspa"/>
+        <a:font script="Syrn" typeface="Estrangelo Edessa"/>
+        <a:font script="Syrj" typeface="Estrangelo Edessa"/>
+        <a:font script="Syre" typeface="Estrangelo Edessa"/>
+        <a:font script="Sora" typeface="Nirmala UI"/>
+        <a:font script="Tale" typeface="Microsoft Tai Le"/>
+        <a:font script="Talu" typeface="Microsoft New Tai Lue"/>
+        <a:font script="Tfng" typeface="Ebrima"/>
+      </a:minorFont>
+    </a:fontScheme>
+    <a:fmtScheme name="Office">
+      <a:fillStyleLst>
+        <a:solidFill>
+          <a:schemeClr val="phClr"/>
+        </a:solidFill>
+        <a:gradFill rotWithShape="1">
+          <a:gsLst>
+            <a:gs pos="0">
+              <a:schemeClr val="phClr">
+                <a:lumMod val="110000"/>
+                <a:satMod val="105000"/>
+                <a:tint val="67000"/>
+              </a:schemeClr>
+            </a:gs>
+            <a:gs pos="50000">
+              <a:schemeClr val="phClr">
+                <a:lumMod val="105000"/>
+                <a:satMod val="103000"/>
+                <a:tint val="73000"/>
+              </a:schemeClr>
+            </a:gs>
+            <a:gs pos="100000">
+              <a:schemeClr val="phClr">
+                <a:lumMod val="105000"/>
+                <a:satMod val="109000"/>
+                <a:tint val="81000"/>
+              </a:schemeClr>
+            </a:gs>
+          </a:gsLst>
+          <a:lin ang="5400000" scaled="0"/>
+        </a:gradFill>
+        <a:gradFill rotWithShape="1">
+          <a:gsLst>
+            <a:gs pos="0">
+              <a:schemeClr val="phClr">
+                <a:satMod val="103000"/>
+                <a:lumMod val="102000"/>
+                <a:tint val="94000"/>
+              </a:schemeClr>
+            </a:gs>
+            <a:gs pos="50000">
+              <a:schemeClr val="phClr">
+                <a:satMod val="110000"/>
+                <a:lumMod val="100000"/>
+                <a:shade val="100000"/>
+              </a:schemeClr>
+            </a:gs>
+            <a:gs pos="100000">
+              <a:schemeClr val="phClr">
+                <a:lumMod val="99000"/>
+                <a:satMod val="120000"/>
+                <a:shade val="78000"/>
+              </a:schemeClr>
+            </a:gs>
+          </a:gsLst>
+          <a:lin ang="5400000" scaled="0"/>
+        </a:gradFill>
+      </a:fillStyleLst>
+      <a:lnStyleLst>
+        <a:ln w="12700" cap="flat" cmpd="sng" algn="ctr">
+          <a:solidFill>
+            <a:schemeClr val="phClr"/>
+          </a:solidFill>
+          <a:prstDash val="solid"/>
+          <a:miter lim="800000"/>
+        </a:ln>
+        <a:ln w="19050" cap="flat" cmpd="sng" algn="ctr">
+          <a:solidFill>
+            <a:schemeClr val="phClr"/>
+          </a:solidFill>
+          <a:prstDash val="solid"/>
+          <a:miter lim="800000"/>
+        </a:ln>
+        <a:ln w="25400" cap="flat" cmpd="sng" algn="ctr">
+          <a:solidFill>
+            <a:schemeClr val="phClr"/>
+          </a:solidFill>
+          <a:prstDash val="solid"/>
+          <a:miter lim="800000"/>
+        </a:ln>
+      </a:lnStyleLst>
+      <a:effectStyleLst>
+        <a:effectStyle>
+          <a:effectLst/>
+        </a:effectStyle>
+        <a:effectStyle>
+          <a:effectLst/>
+        </a:effectStyle>
+        <a:effectStyle>
+          <a:effectLst>
+            <a:outerShdw blurRad="57150" dist="19050" dir="5400000" algn="ctr" rotWithShape="0">
+              <a:srgbClr val="000000">
+                <a:alpha val="63000"/>
+              </a:srgbClr>
+            </a:outerShdw>
+          </a:effectLst>
+        </a:effectStyle>
+      </a:effectStyleLst>
+      <a:bgFillStyleLst>
+        <a:solidFill>
+          <a:schemeClr val="phClr"/>
+        </a:solidFill>
+        <a:solidFill>
+          <a:schemeClr val="phClr">
+            <a:tint val="95000"/>
+            <a:satMod val="170000"/>
+          </a:schemeClr>
+        </a:solidFill>
+        <a:gradFill rotWithShape="1">
+          <a:gsLst>
+            <a:gs pos="0">
+              <a:schemeClr val="phClr">
+                <a:tint val="93000"/>
+                <a:satMod val="150000"/>
+                <a:shade val="98000"/>
+                <a:lumMod val="102000"/>
+              </a:schemeClr>
+            </a:gs>
+            <a:gs pos="50000">
+              <a:schemeClr val="phClr">
+                <a:tint val="98000"/>
+                <a:satMod val="130000"/>
+                <a:shade val="90000"/>
+                <a:lumMod val="103000"/>
+              </a:schemeClr>
+            </a:gs>
+            <a:gs pos="100000">
+              <a:schemeClr val="phClr">
+                <a:shade val="63000"/>
+                <a:satMod val="120000"/>
+              </a:schemeClr>
+            </a:gs>
+          </a:gsLst>
+          <a:lin ang="5400000" scaled="0"/>
+        </a:gradFill>
+      </a:bgFillStyleLst>
+    </a:fmtScheme>
+  </a:themeElements>
+  <a:objectDefaults>
+    <a:lnDef>
+      <a:spPr/>
+      <a:bodyPr/>
+      <a:lstStyle/>
+      <a:style>
+        <a:lnRef idx="2">
+          <a:schemeClr val="accent1"/>
+        </a:lnRef>
+        <a:fillRef idx="0">
+          <a:schemeClr val="accent1"/>
+        </a:fillRef>
+        <a:effectRef idx="1">
+          <a:schemeClr val="accent1"/>
+        </a:effectRef>
+        <a:fontRef idx="minor">
+          <a:schemeClr val="tx1"/>
+        </a:fontRef>
+      </a:style>
+    </a:lnDef>
+  </a:objectDefaults>
+  <a:extraClrSchemeLst/>
+  <a:extLst>
+    <a:ext uri="{05A4C25C-085E-4340-85A3-A5531E510DB2}">
+      <thm15:themeFamily xmlns:thm15="http://schemas.microsoft.com/office/thememl/2012/main" name="Office Theme" id="{2E142A2C-CD16-42D6-873A-C26D2A0506FA}" vid="{1BDDFF52-6CD6-40A5-AB3C-68EB2F1E4D0A}"/>
+    </a:ext>
+  </a:extLst>
+</a:theme>
 </file>